--- a/dist/초1/음악·미술/미술놀이/초1_음악·미술_미술놀이_01_색·선·모양탐색.pptx
+++ b/dist/초1/음악·미술/미술놀이/초1_음악·미술_미술놀이_01_색·선·모양탐색.pptx
@@ -114,34 +114,34 @@
   <p:extLst>
     <p:ext uri="{521415D9-36F7-43E2-AB2F-B90AF26B5E84}">
       <p14:sectionLst xmlns:p14="http://schemas.microsoft.com/office/powerpoint/2010/main">
-        <p14:section name="도입" id="{4ec45ecd-0421-8182-e604-e008952872fc}">
+        <p14:section name="도입" id="{195610fa-80d2-f2be-2820-c52b3dcb5abb}">
           <p14:sldIdLst>
             <p14:sldId id="256"/>
             <p14:sldId id="257"/>
           </p14:sldIdLst>
         </p14:section>
-        <p14:section name="개념" id="{e56ba4b7-16aa-065c-ff74-6f1dd927d329}">
+        <p14:section name="개념" id="{42cfb5e9-9186-be77-4f87-5cf0fe4376af}">
           <p14:sldIdLst>
             <p14:sldId id="258"/>
           </p14:sldIdLst>
         </p14:section>
-        <p14:section name="연습" id="{7b85ea28-9938-8886-49ce-76f180cc9a0c}">
+        <p14:section name="연습" id="{9e8f1ad4-7443-f9fd-0684-415e0d5d49a5}">
           <p14:sldIdLst>
             <p14:sldId id="259"/>
             <p14:sldId id="260"/>
           </p14:sldIdLst>
         </p14:section>
-        <p14:section name="확인" id="{f24fc09a-78de-d1b3-1e5a-2e031d3aa615}">
+        <p14:section name="확인" id="{dce730a6-77b0-5ccb-c431-440a428ea49f}">
           <p14:sldIdLst>
             <p14:sldId id="261"/>
           </p14:sldIdLst>
         </p14:section>
-        <p14:section name="정리" id="{d9e8f1eb-9ceb-d0cd-ba45-e35a2d0dc226}">
+        <p14:section name="정리" id="{c59fa578-2bf4-9c03-57f0-b7a33f188ab3}">
           <p14:sldIdLst>
             <p14:sldId id="262"/>
           </p14:sldIdLst>
         </p14:section>
-        <p14:section name="보충" id="{c7f17e5f-c7a2-fd83-b60c-0bff5b2e3547}">
+        <p14:section name="보충" id="{be0277a6-6256-237b-c922-60dfcc9413ac}">
           <p14:sldIdLst>
             <p14:sldId id="263"/>
           </p14:sldIdLst>
@@ -960,7 +960,7 @@
 목적: 선과 색만으로도 날씨나 기분, 있었던 일을 나타낼 수 있다는 것을 그림을 보고 짐작하며 알게 합니다. 내 이야기를 그릴 때 선과 색을 고르는 연습입니다(목표 B, M3).
 시간: 약 5분
 이렇게 말해 보세요
-- “가는 어떤 날 같아? 왜 그렇게 생각했어?”
+- “이 두 그림은 선과 색으로만 그렸어. 가는 어떤 날 같아? 왜 그렇게 생각했어?”
 - “나는 어떤 날 같아? 어떤 기분이 들어?”
 - “만약 신나는 날을 그린다면 어떤 선과 색을 쓰고 싶어?”
 예상 답
@@ -3403,7 +3403,46 @@
       </p:sp>
       <p:sp>
         <p:nvSpPr>
-          <p:cNvPr id="3" name="S03-card17"/>
+          <p:cNvPr id="3" name="S03-text17"/>
+          <p:cNvSpPr txBox="1"/>
+          <p:nvPr/>
+        </p:nvSpPr>
+        <p:spPr>
+          <a:xfrm>
+            <a:off x="548640" y="1325880"/>
+            <a:ext cx="11091672" cy="502920"/>
+          </a:xfrm>
+          <a:prstGeom prst="rect">
+            <a:avLst/>
+          </a:prstGeom>
+          <a:noFill/>
+          <a:ln/>
+        </p:spPr>
+        <p:txBody>
+          <a:bodyPr wrap="square" lIns="0" tIns="0" rIns="0" bIns="0" rtlCol="0" anchor="ctr"/>
+          <a:lstStyle/>
+          <a:p>
+            <a:pPr eaLnBrk="0" algn="l" indent="0" marL="0">
+              <a:buNone/>
+            </a:pPr>
+            <a:r>
+              <a:rPr lang="ko-KR" altLang="en-US" sz="3200" dirty="0">
+                <a:solidFill>
+                  <a:srgbClr val="1F2937"/>
+                </a:solidFill>
+                <a:latin typeface="맑은 고딕" pitchFamily="34" charset="0"/>
+                <a:ea typeface="맑은 고딕" pitchFamily="34" charset="-122"/>
+                <a:cs typeface="맑은 고딕" pitchFamily="34" charset="-120"/>
+              </a:rPr>
+              <a:t>손가락으로 따라가 봐요.</a:t>
+            </a:r>
+            <a:endParaRPr lang="ko-KR" sz="3200" dirty="0"/>
+          </a:p>
+        </p:txBody>
+      </p:sp>
+      <p:sp>
+        <p:nvSpPr>
+          <p:cNvPr id="4" name="S03-card18"/>
           <p:cNvSpPr/>
           <p:nvPr/>
         </p:nvSpPr>
@@ -3430,7 +3469,7 @@
       </p:sp>
       <p:sp>
         <p:nvSpPr>
-          <p:cNvPr id="4" name="S03-cardtext18"/>
+          <p:cNvPr id="5" name="S03-cardtext19"/>
           <p:cNvSpPr txBox="1"/>
           <p:nvPr/>
         </p:nvSpPr>
@@ -3472,13 +3511,13 @@
       </p:sp>
       <p:sp>
         <p:nvSpPr>
-          <p:cNvPr id="5" name="S03-figure19" descr="파란 곧은 선"/>
+          <p:cNvPr id="6" name="S03-figure20" descr="파란 곧은 선"/>
           <p:cNvSpPr/>
           <p:nvPr/>
         </p:nvSpPr>
         <p:spPr>
           <a:xfrm>
-            <a:off x="647700" y="2963799"/>
+            <a:off x="647700" y="3306699"/>
             <a:ext cx="2334768" cy="9144"/>
           </a:xfrm>
           <a:custGeom>
@@ -3509,7 +3548,7 @@
       </p:sp>
       <p:sp>
         <p:nvSpPr>
-          <p:cNvPr id="6" name="S03-label20"/>
+          <p:cNvPr id="7" name="S03-label21"/>
           <p:cNvSpPr txBox="1"/>
           <p:nvPr/>
         </p:nvSpPr>
@@ -3548,14 +3587,14 @@
       </p:sp>
       <p:sp>
         <p:nvSpPr>
-          <p:cNvPr id="7" name="S03-figure21" descr="초록빛 구불구불한 선"/>
+          <p:cNvPr id="8" name="S03-figure22" descr="초록빛 구불구불한 선"/>
           <p:cNvSpPr/>
           <p:nvPr/>
         </p:nvSpPr>
         <p:spPr>
           <a:xfrm>
-            <a:off x="3500628" y="2613584"/>
-            <a:ext cx="2334768" cy="700430"/>
+            <a:off x="3500628" y="2839745"/>
+            <a:ext cx="2334768" cy="933907"/>
           </a:xfrm>
           <a:custGeom>
             <a:avLst/>
@@ -3564,153 +3603,153 @@
             <a:cxnLst/>
             <a:rect l="l" t="t" r="r" b="b"/>
             <a:pathLst>
-              <a:path w="2334768" h="700430">
+              <a:path w="2334768" h="933907">
                 <a:moveTo>
-                  <a:pt x="0" y="350215"/>
+                  <a:pt x="0" y="466954"/>
                 </a:moveTo>
                 <a:lnTo>
-                  <a:pt x="48446" y="259743"/>
-                </a:lnTo>
-                <a:lnTo>
-                  <a:pt x="97477" y="175108"/>
-                </a:lnTo>
-                <a:lnTo>
-                  <a:pt x="145923" y="102730"/>
-                </a:lnTo>
-                <a:lnTo>
-                  <a:pt x="194369" y="46695"/>
-                </a:lnTo>
-                <a:lnTo>
-                  <a:pt x="243400" y="11674"/>
-                </a:lnTo>
-                <a:lnTo>
-                  <a:pt x="291846" y="0"/>
-                </a:lnTo>
-                <a:lnTo>
-                  <a:pt x="340292" y="11674"/>
-                </a:lnTo>
-                <a:lnTo>
-                  <a:pt x="389323" y="46695"/>
-                </a:lnTo>
-                <a:lnTo>
-                  <a:pt x="437769" y="102730"/>
-                </a:lnTo>
-                <a:lnTo>
-                  <a:pt x="486215" y="175108"/>
-                </a:lnTo>
-                <a:lnTo>
-                  <a:pt x="535246" y="259743"/>
-                </a:lnTo>
-                <a:lnTo>
-                  <a:pt x="583692" y="350215"/>
-                </a:lnTo>
-                <a:lnTo>
-                  <a:pt x="632138" y="440687"/>
-                </a:lnTo>
-                <a:lnTo>
-                  <a:pt x="681169" y="525323"/>
-                </a:lnTo>
-                <a:lnTo>
-                  <a:pt x="729615" y="597701"/>
-                </a:lnTo>
-                <a:lnTo>
-                  <a:pt x="778061" y="653735"/>
-                </a:lnTo>
-                <a:lnTo>
-                  <a:pt x="827092" y="688757"/>
-                </a:lnTo>
-                <a:lnTo>
-                  <a:pt x="875538" y="700430"/>
-                </a:lnTo>
-                <a:lnTo>
-                  <a:pt x="923984" y="688757"/>
-                </a:lnTo>
-                <a:lnTo>
-                  <a:pt x="973015" y="653735"/>
-                </a:lnTo>
-                <a:lnTo>
-                  <a:pt x="1021461" y="597701"/>
-                </a:lnTo>
-                <a:lnTo>
-                  <a:pt x="1069907" y="525323"/>
-                </a:lnTo>
-                <a:lnTo>
-                  <a:pt x="1118938" y="440687"/>
-                </a:lnTo>
-                <a:lnTo>
-                  <a:pt x="1167384" y="350215"/>
-                </a:lnTo>
-                <a:lnTo>
-                  <a:pt x="1215830" y="259743"/>
-                </a:lnTo>
-                <a:lnTo>
-                  <a:pt x="1264861" y="175108"/>
-                </a:lnTo>
-                <a:lnTo>
-                  <a:pt x="1313307" y="102730"/>
-                </a:lnTo>
-                <a:lnTo>
-                  <a:pt x="1361753" y="46695"/>
-                </a:lnTo>
-                <a:lnTo>
-                  <a:pt x="1410784" y="11674"/>
-                </a:lnTo>
-                <a:lnTo>
-                  <a:pt x="1459230" y="0"/>
-                </a:lnTo>
-                <a:lnTo>
-                  <a:pt x="1507676" y="11674"/>
-                </a:lnTo>
-                <a:lnTo>
-                  <a:pt x="1556707" y="46695"/>
-                </a:lnTo>
-                <a:lnTo>
-                  <a:pt x="1605153" y="102730"/>
-                </a:lnTo>
-                <a:lnTo>
-                  <a:pt x="1653599" y="175108"/>
-                </a:lnTo>
-                <a:lnTo>
-                  <a:pt x="1702630" y="259743"/>
-                </a:lnTo>
-                <a:lnTo>
-                  <a:pt x="1751076" y="350215"/>
-                </a:lnTo>
-                <a:lnTo>
-                  <a:pt x="1799522" y="440687"/>
-                </a:lnTo>
-                <a:lnTo>
-                  <a:pt x="1848553" y="525323"/>
-                </a:lnTo>
-                <a:lnTo>
-                  <a:pt x="1896999" y="597701"/>
-                </a:lnTo>
-                <a:lnTo>
-                  <a:pt x="1945445" y="653735"/>
-                </a:lnTo>
-                <a:lnTo>
-                  <a:pt x="1994476" y="688757"/>
-                </a:lnTo>
-                <a:lnTo>
-                  <a:pt x="2042922" y="700430"/>
-                </a:lnTo>
-                <a:lnTo>
-                  <a:pt x="2091368" y="688757"/>
-                </a:lnTo>
-                <a:lnTo>
-                  <a:pt x="2140399" y="653735"/>
-                </a:lnTo>
-                <a:lnTo>
-                  <a:pt x="2188845" y="597701"/>
-                </a:lnTo>
-                <a:lnTo>
-                  <a:pt x="2237291" y="525323"/>
-                </a:lnTo>
-                <a:lnTo>
-                  <a:pt x="2286322" y="440687"/>
-                </a:lnTo>
-                <a:lnTo>
-                  <a:pt x="2334768" y="350215"/>
+                  <a:pt x="48252" y="375898"/>
+                </a:lnTo>
+                <a:lnTo>
+                  <a:pt x="97282" y="287955"/>
+                </a:lnTo>
+                <a:lnTo>
+                  <a:pt x="146312" y="207794"/>
+                </a:lnTo>
+                <a:lnTo>
+                  <a:pt x="194564" y="136973"/>
+                </a:lnTo>
+                <a:lnTo>
+                  <a:pt x="242816" y="78604"/>
+                </a:lnTo>
+                <a:lnTo>
+                  <a:pt x="291846" y="35800"/>
+                </a:lnTo>
+                <a:lnTo>
+                  <a:pt x="340876" y="9339"/>
+                </a:lnTo>
+                <a:lnTo>
+                  <a:pt x="389128" y="0"/>
+                </a:lnTo>
+                <a:lnTo>
+                  <a:pt x="437380" y="9339"/>
+                </a:lnTo>
+                <a:lnTo>
+                  <a:pt x="486410" y="35800"/>
+                </a:lnTo>
+                <a:lnTo>
+                  <a:pt x="535440" y="78604"/>
+                </a:lnTo>
+                <a:lnTo>
+                  <a:pt x="583692" y="136973"/>
+                </a:lnTo>
+                <a:lnTo>
+                  <a:pt x="631944" y="207794"/>
+                </a:lnTo>
+                <a:lnTo>
+                  <a:pt x="680974" y="287955"/>
+                </a:lnTo>
+                <a:lnTo>
+                  <a:pt x="730004" y="375898"/>
+                </a:lnTo>
+                <a:lnTo>
+                  <a:pt x="778256" y="466954"/>
+                </a:lnTo>
+                <a:lnTo>
+                  <a:pt x="826508" y="558010"/>
+                </a:lnTo>
+                <a:lnTo>
+                  <a:pt x="875538" y="645952"/>
+                </a:lnTo>
+                <a:lnTo>
+                  <a:pt x="924568" y="726113"/>
+                </a:lnTo>
+                <a:lnTo>
+                  <a:pt x="972820" y="796934"/>
+                </a:lnTo>
+                <a:lnTo>
+                  <a:pt x="1021072" y="855303"/>
+                </a:lnTo>
+                <a:lnTo>
+                  <a:pt x="1070102" y="898107"/>
+                </a:lnTo>
+                <a:lnTo>
+                  <a:pt x="1119132" y="924568"/>
+                </a:lnTo>
+                <a:lnTo>
+                  <a:pt x="1167384" y="933907"/>
+                </a:lnTo>
+                <a:lnTo>
+                  <a:pt x="1215636" y="924568"/>
+                </a:lnTo>
+                <a:lnTo>
+                  <a:pt x="1264666" y="898107"/>
+                </a:lnTo>
+                <a:lnTo>
+                  <a:pt x="1313696" y="855303"/>
+                </a:lnTo>
+                <a:lnTo>
+                  <a:pt x="1361948" y="796934"/>
+                </a:lnTo>
+                <a:lnTo>
+                  <a:pt x="1410200" y="726113"/>
+                </a:lnTo>
+                <a:lnTo>
+                  <a:pt x="1459230" y="645952"/>
+                </a:lnTo>
+                <a:lnTo>
+                  <a:pt x="1508260" y="558010"/>
+                </a:lnTo>
+                <a:lnTo>
+                  <a:pt x="1556512" y="466954"/>
+                </a:lnTo>
+                <a:lnTo>
+                  <a:pt x="1604764" y="375898"/>
+                </a:lnTo>
+                <a:lnTo>
+                  <a:pt x="1653794" y="287955"/>
+                </a:lnTo>
+                <a:lnTo>
+                  <a:pt x="1702824" y="207794"/>
+                </a:lnTo>
+                <a:lnTo>
+                  <a:pt x="1751076" y="136973"/>
+                </a:lnTo>
+                <a:lnTo>
+                  <a:pt x="1799328" y="78604"/>
+                </a:lnTo>
+                <a:lnTo>
+                  <a:pt x="1848358" y="35800"/>
+                </a:lnTo>
+                <a:lnTo>
+                  <a:pt x="1897388" y="9339"/>
+                </a:lnTo>
+                <a:lnTo>
+                  <a:pt x="1945640" y="0"/>
+                </a:lnTo>
+                <a:lnTo>
+                  <a:pt x="1993892" y="9339"/>
+                </a:lnTo>
+                <a:lnTo>
+                  <a:pt x="2042922" y="35800"/>
+                </a:lnTo>
+                <a:lnTo>
+                  <a:pt x="2091952" y="78604"/>
+                </a:lnTo>
+                <a:lnTo>
+                  <a:pt x="2140204" y="136973"/>
+                </a:lnTo>
+                <a:lnTo>
+                  <a:pt x="2188456" y="207794"/>
+                </a:lnTo>
+                <a:lnTo>
+                  <a:pt x="2237486" y="287955"/>
+                </a:lnTo>
+                <a:lnTo>
+                  <a:pt x="2286516" y="375898"/>
+                </a:lnTo>
+                <a:lnTo>
+                  <a:pt x="2334768" y="466954"/>
                 </a:lnTo>
               </a:path>
             </a:pathLst>
@@ -3726,7 +3765,7 @@
       </p:sp>
       <p:sp>
         <p:nvSpPr>
-          <p:cNvPr id="8" name="S03-label22"/>
+          <p:cNvPr id="9" name="S03-label23"/>
           <p:cNvSpPr txBox="1"/>
           <p:nvPr/>
         </p:nvSpPr>
@@ -3765,14 +3804,14 @@
       </p:sp>
       <p:sp>
         <p:nvSpPr>
-          <p:cNvPr id="9" name="S03-figure23" descr="주황 지그재그 선"/>
+          <p:cNvPr id="10" name="S03-figure24" descr="주황 지그재그 선"/>
           <p:cNvSpPr/>
           <p:nvPr/>
         </p:nvSpPr>
         <p:spPr>
           <a:xfrm>
-            <a:off x="6353556" y="2613584"/>
-            <a:ext cx="2334768" cy="700430"/>
+            <a:off x="6353556" y="2839745"/>
+            <a:ext cx="2334768" cy="933907"/>
           </a:xfrm>
           <a:custGeom>
             <a:avLst/>
@@ -3781,33 +3820,27 @@
             <a:cxnLst/>
             <a:rect l="l" t="t" r="r" b="b"/>
             <a:pathLst>
-              <a:path w="2334768" h="700430">
+              <a:path w="2334768" h="933907">
                 <a:moveTo>
-                  <a:pt x="0" y="700430"/>
+                  <a:pt x="0" y="933907"/>
                 </a:moveTo>
                 <a:lnTo>
-                  <a:pt x="291846" y="0"/>
-                </a:lnTo>
-                <a:lnTo>
-                  <a:pt x="583692" y="700430"/>
-                </a:lnTo>
-                <a:lnTo>
-                  <a:pt x="875538" y="0"/>
-                </a:lnTo>
-                <a:lnTo>
-                  <a:pt x="1167384" y="700430"/>
-                </a:lnTo>
-                <a:lnTo>
-                  <a:pt x="1459230" y="0"/>
-                </a:lnTo>
-                <a:lnTo>
-                  <a:pt x="1751076" y="700430"/>
-                </a:lnTo>
-                <a:lnTo>
-                  <a:pt x="2042922" y="0"/>
-                </a:lnTo>
-                <a:lnTo>
-                  <a:pt x="2334768" y="700430"/>
+                  <a:pt x="389128" y="0"/>
+                </a:lnTo>
+                <a:lnTo>
+                  <a:pt x="778256" y="933907"/>
+                </a:lnTo>
+                <a:lnTo>
+                  <a:pt x="1167384" y="0"/>
+                </a:lnTo>
+                <a:lnTo>
+                  <a:pt x="1556512" y="933907"/>
+                </a:lnTo>
+                <a:lnTo>
+                  <a:pt x="1945640" y="0"/>
+                </a:lnTo>
+                <a:lnTo>
+                  <a:pt x="2334768" y="933907"/>
                 </a:lnTo>
               </a:path>
             </a:pathLst>
@@ -3823,7 +3856,7 @@
       </p:sp>
       <p:sp>
         <p:nvSpPr>
-          <p:cNvPr id="10" name="S03-label24"/>
+          <p:cNvPr id="11" name="S03-label25"/>
           <p:cNvSpPr txBox="1"/>
           <p:nvPr/>
         </p:nvSpPr>
@@ -3862,14 +3895,14 @@
       </p:sp>
       <p:sp>
         <p:nvSpPr>
-          <p:cNvPr id="11" name="S03-figure25" descr="빨간 빙글빙글 선"/>
+          <p:cNvPr id="12" name="S03-figure26" descr="빨간 빙글빙글 선"/>
           <p:cNvSpPr/>
           <p:nvPr/>
         </p:nvSpPr>
         <p:spPr>
           <a:xfrm>
-            <a:off x="9595807" y="2262201"/>
-            <a:ext cx="1711969" cy="1557874"/>
+            <a:off x="9757489" y="2751024"/>
+            <a:ext cx="1355722" cy="1233536"/>
           </a:xfrm>
           <a:custGeom>
             <a:avLst/>
@@ -3878,279 +3911,279 @@
             <a:cxnLst/>
             <a:rect l="l" t="t" r="r" b="b"/>
             <a:pathLst>
-              <a:path w="1711969" h="1557874">
+              <a:path w="1355722" h="1233536">
                 <a:moveTo>
-                  <a:pt x="778061" y="701598"/>
+                  <a:pt x="616379" y="555675"/>
                 </a:moveTo>
                 <a:lnTo>
-                  <a:pt x="787984" y="699263"/>
-                </a:lnTo>
-                <a:lnTo>
-                  <a:pt x="796740" y="693426"/>
-                </a:lnTo>
-                <a:lnTo>
-                  <a:pt x="803160" y="683503"/>
-                </a:lnTo>
-                <a:lnTo>
-                  <a:pt x="806079" y="670662"/>
-                </a:lnTo>
-                <a:lnTo>
-                  <a:pt x="803744" y="656654"/>
-                </a:lnTo>
-                <a:lnTo>
-                  <a:pt x="797323" y="642645"/>
-                </a:lnTo>
-                <a:lnTo>
-                  <a:pt x="785649" y="629220"/>
-                </a:lnTo>
-                <a:lnTo>
-                  <a:pt x="769306" y="619297"/>
-                </a:lnTo>
-                <a:lnTo>
-                  <a:pt x="749461" y="612877"/>
-                </a:lnTo>
-                <a:lnTo>
-                  <a:pt x="726113" y="611709"/>
-                </a:lnTo>
-                <a:lnTo>
-                  <a:pt x="701598" y="616962"/>
-                </a:lnTo>
-                <a:lnTo>
-                  <a:pt x="677083" y="628636"/>
-                </a:lnTo>
-                <a:lnTo>
-                  <a:pt x="654902" y="646731"/>
-                </a:lnTo>
-                <a:lnTo>
-                  <a:pt x="636224" y="671246"/>
-                </a:lnTo>
-                <a:lnTo>
-                  <a:pt x="622216" y="701598"/>
-                </a:lnTo>
-                <a:lnTo>
-                  <a:pt x="615795" y="736036"/>
-                </a:lnTo>
-                <a:lnTo>
-                  <a:pt x="616962" y="773392"/>
-                </a:lnTo>
-                <a:lnTo>
-                  <a:pt x="626885" y="811332"/>
-                </a:lnTo>
-                <a:lnTo>
-                  <a:pt x="646147" y="848104"/>
-                </a:lnTo>
-                <a:lnTo>
-                  <a:pt x="674164" y="881375"/>
-                </a:lnTo>
-                <a:lnTo>
-                  <a:pt x="710937" y="908808"/>
-                </a:lnTo>
-                <a:lnTo>
-                  <a:pt x="754130" y="928654"/>
-                </a:lnTo>
-                <a:lnTo>
-                  <a:pt x="803160" y="939160"/>
-                </a:lnTo>
-                <a:lnTo>
-                  <a:pt x="855109" y="938577"/>
-                </a:lnTo>
-                <a:lnTo>
-                  <a:pt x="907641" y="926319"/>
-                </a:lnTo>
-                <a:lnTo>
-                  <a:pt x="958422" y="901804"/>
-                </a:lnTo>
-                <a:lnTo>
-                  <a:pt x="1004534" y="866199"/>
-                </a:lnTo>
-                <a:lnTo>
-                  <a:pt x="1043641" y="819504"/>
-                </a:lnTo>
-                <a:lnTo>
-                  <a:pt x="1072242" y="764053"/>
-                </a:lnTo>
-                <a:lnTo>
-                  <a:pt x="1089169" y="701598"/>
-                </a:lnTo>
-                <a:lnTo>
-                  <a:pt x="1092671" y="634473"/>
-                </a:lnTo>
-                <a:lnTo>
-                  <a:pt x="1081581" y="566765"/>
-                </a:lnTo>
-                <a:lnTo>
-                  <a:pt x="1055315" y="500224"/>
-                </a:lnTo>
-                <a:lnTo>
-                  <a:pt x="1013873" y="439520"/>
-                </a:lnTo>
-                <a:lnTo>
-                  <a:pt x="959590" y="386988"/>
-                </a:lnTo>
-                <a:lnTo>
-                  <a:pt x="893632" y="346129"/>
-                </a:lnTo>
-                <a:lnTo>
-                  <a:pt x="818336" y="319863"/>
-                </a:lnTo>
-                <a:lnTo>
-                  <a:pt x="736619" y="309357"/>
-                </a:lnTo>
-                <a:lnTo>
-                  <a:pt x="653151" y="316945"/>
-                </a:lnTo>
-                <a:lnTo>
-                  <a:pt x="570267" y="342044"/>
-                </a:lnTo>
-                <a:lnTo>
-                  <a:pt x="493220" y="385237"/>
-                </a:lnTo>
-                <a:lnTo>
-                  <a:pt x="425511" y="445357"/>
-                </a:lnTo>
-                <a:lnTo>
-                  <a:pt x="370644" y="520070"/>
-                </a:lnTo>
-                <a:lnTo>
-                  <a:pt x="331537" y="606456"/>
-                </a:lnTo>
-                <a:lnTo>
-                  <a:pt x="311108" y="701598"/>
-                </a:lnTo>
-                <a:lnTo>
-                  <a:pt x="311108" y="800825"/>
-                </a:lnTo>
-                <a:lnTo>
-                  <a:pt x="332704" y="900053"/>
-                </a:lnTo>
-                <a:lnTo>
-                  <a:pt x="375314" y="994611"/>
-                </a:lnTo>
-                <a:lnTo>
-                  <a:pt x="437769" y="1079247"/>
-                </a:lnTo>
-                <a:lnTo>
-                  <a:pt x="518902" y="1151041"/>
-                </a:lnTo>
-                <a:lnTo>
-                  <a:pt x="614628" y="1204740"/>
-                </a:lnTo>
-                <a:lnTo>
-                  <a:pt x="721443" y="1238011"/>
-                </a:lnTo>
-                <a:lnTo>
-                  <a:pt x="835263" y="1248517"/>
-                </a:lnTo>
-                <a:lnTo>
-                  <a:pt x="951418" y="1234509"/>
-                </a:lnTo>
-                <a:lnTo>
-                  <a:pt x="1063487" y="1195985"/>
-                </a:lnTo>
-                <a:lnTo>
-                  <a:pt x="1166800" y="1133530"/>
-                </a:lnTo>
-                <a:lnTo>
-                  <a:pt x="1256689" y="1049478"/>
-                </a:lnTo>
-                <a:lnTo>
-                  <a:pt x="1327899" y="946165"/>
-                </a:lnTo>
-                <a:lnTo>
-                  <a:pt x="1376929" y="828843"/>
-                </a:lnTo>
-                <a:lnTo>
-                  <a:pt x="1400861" y="701598"/>
-                </a:lnTo>
-                <a:lnTo>
-                  <a:pt x="1397359" y="570267"/>
-                </a:lnTo>
-                <a:lnTo>
-                  <a:pt x="1365839" y="440104"/>
-                </a:lnTo>
-                <a:lnTo>
-                  <a:pt x="1306886" y="317528"/>
-                </a:lnTo>
-                <a:lnTo>
-                  <a:pt x="1222251" y="207794"/>
-                </a:lnTo>
-                <a:lnTo>
-                  <a:pt x="1115435" y="117322"/>
-                </a:lnTo>
-                <a:lnTo>
-                  <a:pt x="989942" y="50198"/>
-                </a:lnTo>
-                <a:lnTo>
-                  <a:pt x="851023" y="9923"/>
-                </a:lnTo>
-                <a:lnTo>
-                  <a:pt x="704516" y="0"/>
-                </a:lnTo>
-                <a:lnTo>
-                  <a:pt x="556842" y="20429"/>
-                </a:lnTo>
-                <a:lnTo>
-                  <a:pt x="415005" y="72378"/>
-                </a:lnTo>
-                <a:lnTo>
-                  <a:pt x="284842" y="154095"/>
-                </a:lnTo>
-                <a:lnTo>
-                  <a:pt x="173357" y="262661"/>
-                </a:lnTo>
-                <a:lnTo>
-                  <a:pt x="85803" y="393408"/>
-                </a:lnTo>
-                <a:lnTo>
-                  <a:pt x="26850" y="541666"/>
-                </a:lnTo>
-                <a:lnTo>
-                  <a:pt x="0" y="701598"/>
-                </a:lnTo>
-                <a:lnTo>
-                  <a:pt x="6421" y="865615"/>
-                </a:lnTo>
-                <a:lnTo>
-                  <a:pt x="47863" y="1026714"/>
-                </a:lnTo>
-                <a:lnTo>
-                  <a:pt x="123159" y="1177307"/>
-                </a:lnTo>
-                <a:lnTo>
-                  <a:pt x="229391" y="1310972"/>
-                </a:lnTo>
-                <a:lnTo>
-                  <a:pt x="363056" y="1420706"/>
-                </a:lnTo>
-                <a:lnTo>
-                  <a:pt x="518318" y="1501256"/>
-                </a:lnTo>
-                <a:lnTo>
-                  <a:pt x="689340" y="1547951"/>
-                </a:lnTo>
-                <a:lnTo>
-                  <a:pt x="867950" y="1557874"/>
-                </a:lnTo>
-                <a:lnTo>
-                  <a:pt x="1047143" y="1530440"/>
-                </a:lnTo>
-                <a:lnTo>
-                  <a:pt x="1219333" y="1465651"/>
-                </a:lnTo>
-                <a:lnTo>
-                  <a:pt x="1375178" y="1364672"/>
-                </a:lnTo>
-                <a:lnTo>
-                  <a:pt x="1508260" y="1232174"/>
-                </a:lnTo>
-                <a:lnTo>
-                  <a:pt x="1612157" y="1072826"/>
-                </a:lnTo>
-                <a:lnTo>
-                  <a:pt x="1681617" y="893632"/>
-                </a:lnTo>
-                <a:lnTo>
-                  <a:pt x="1711969" y="701598"/>
+                  <a:pt x="624161" y="554118"/>
+                </a:lnTo>
+                <a:lnTo>
+                  <a:pt x="631166" y="548670"/>
+                </a:lnTo>
+                <a:lnTo>
+                  <a:pt x="636613" y="540888"/>
+                </a:lnTo>
+                <a:lnTo>
+                  <a:pt x="638170" y="531549"/>
+                </a:lnTo>
+                <a:lnTo>
+                  <a:pt x="636613" y="519875"/>
+                </a:lnTo>
+                <a:lnTo>
+                  <a:pt x="631944" y="508979"/>
+                </a:lnTo>
+                <a:lnTo>
+                  <a:pt x="622605" y="498862"/>
+                </a:lnTo>
+                <a:lnTo>
+                  <a:pt x="609374" y="490301"/>
+                </a:lnTo>
+                <a:lnTo>
+                  <a:pt x="593809" y="485632"/>
+                </a:lnTo>
+                <a:lnTo>
+                  <a:pt x="575131" y="484853"/>
+                </a:lnTo>
+                <a:lnTo>
+                  <a:pt x="555675" y="488745"/>
+                </a:lnTo>
+                <a:lnTo>
+                  <a:pt x="536997" y="498084"/>
+                </a:lnTo>
+                <a:lnTo>
+                  <a:pt x="519097" y="512092"/>
+                </a:lnTo>
+                <a:lnTo>
+                  <a:pt x="503532" y="531549"/>
+                </a:lnTo>
+                <a:lnTo>
+                  <a:pt x="493414" y="555675"/>
+                </a:lnTo>
+                <a:lnTo>
+                  <a:pt x="487967" y="582914"/>
+                </a:lnTo>
+                <a:lnTo>
+                  <a:pt x="488745" y="612487"/>
+                </a:lnTo>
+                <a:lnTo>
+                  <a:pt x="496527" y="642839"/>
+                </a:lnTo>
+                <a:lnTo>
+                  <a:pt x="512092" y="671635"/>
+                </a:lnTo>
+                <a:lnTo>
+                  <a:pt x="533884" y="698096"/>
+                </a:lnTo>
+                <a:lnTo>
+                  <a:pt x="563457" y="719887"/>
+                </a:lnTo>
+                <a:lnTo>
+                  <a:pt x="597701" y="735452"/>
+                </a:lnTo>
+                <a:lnTo>
+                  <a:pt x="635835" y="743234"/>
+                </a:lnTo>
+                <a:lnTo>
+                  <a:pt x="677083" y="743234"/>
+                </a:lnTo>
+                <a:lnTo>
+                  <a:pt x="719109" y="733895"/>
+                </a:lnTo>
+                <a:lnTo>
+                  <a:pt x="759578" y="714439"/>
+                </a:lnTo>
+                <a:lnTo>
+                  <a:pt x="796156" y="686422"/>
+                </a:lnTo>
+                <a:lnTo>
+                  <a:pt x="826508" y="649066"/>
+                </a:lnTo>
+                <a:lnTo>
+                  <a:pt x="849077" y="605483"/>
+                </a:lnTo>
+                <a:lnTo>
+                  <a:pt x="863086" y="555675"/>
+                </a:lnTo>
+                <a:lnTo>
+                  <a:pt x="865421" y="502753"/>
+                </a:lnTo>
+                <a:lnTo>
+                  <a:pt x="856860" y="449054"/>
+                </a:lnTo>
+                <a:lnTo>
+                  <a:pt x="835847" y="396132"/>
+                </a:lnTo>
+                <a:lnTo>
+                  <a:pt x="803160" y="347880"/>
+                </a:lnTo>
+                <a:lnTo>
+                  <a:pt x="760356" y="306633"/>
+                </a:lnTo>
+                <a:lnTo>
+                  <a:pt x="707435" y="274724"/>
+                </a:lnTo>
+                <a:lnTo>
+                  <a:pt x="648287" y="253711"/>
+                </a:lnTo>
+                <a:lnTo>
+                  <a:pt x="583692" y="245151"/>
+                </a:lnTo>
+                <a:lnTo>
+                  <a:pt x="517540" y="250598"/>
+                </a:lnTo>
+                <a:lnTo>
+                  <a:pt x="452167" y="270833"/>
+                </a:lnTo>
+                <a:lnTo>
+                  <a:pt x="390685" y="305076"/>
+                </a:lnTo>
+                <a:lnTo>
+                  <a:pt x="336985" y="352550"/>
+                </a:lnTo>
+                <a:lnTo>
+                  <a:pt x="293403" y="411697"/>
+                </a:lnTo>
+                <a:lnTo>
+                  <a:pt x="263051" y="480184"/>
+                </a:lnTo>
+                <a:lnTo>
+                  <a:pt x="246707" y="555675"/>
+                </a:lnTo>
+                <a:lnTo>
+                  <a:pt x="246707" y="634279"/>
+                </a:lnTo>
+                <a:lnTo>
+                  <a:pt x="263829" y="712882"/>
+                </a:lnTo>
+                <a:lnTo>
+                  <a:pt x="297294" y="787595"/>
+                </a:lnTo>
+                <a:lnTo>
+                  <a:pt x="347102" y="854525"/>
+                </a:lnTo>
+                <a:lnTo>
+                  <a:pt x="410919" y="911338"/>
+                </a:lnTo>
+                <a:lnTo>
+                  <a:pt x="487188" y="954142"/>
+                </a:lnTo>
+                <a:lnTo>
+                  <a:pt x="572018" y="980603"/>
+                </a:lnTo>
+                <a:lnTo>
+                  <a:pt x="661518" y="988385"/>
+                </a:lnTo>
+                <a:lnTo>
+                  <a:pt x="753352" y="977490"/>
+                </a:lnTo>
+                <a:lnTo>
+                  <a:pt x="842073" y="947138"/>
+                </a:lnTo>
+                <a:lnTo>
+                  <a:pt x="924568" y="897329"/>
+                </a:lnTo>
+                <a:lnTo>
+                  <a:pt x="995389" y="831177"/>
+                </a:lnTo>
+                <a:lnTo>
+                  <a:pt x="1051424" y="749461"/>
+                </a:lnTo>
+                <a:lnTo>
+                  <a:pt x="1090337" y="656070"/>
+                </a:lnTo>
+                <a:lnTo>
+                  <a:pt x="1109015" y="555675"/>
+                </a:lnTo>
+                <a:lnTo>
+                  <a:pt x="1106680" y="451388"/>
+                </a:lnTo>
+                <a:lnTo>
+                  <a:pt x="1081776" y="348659"/>
+                </a:lnTo>
+                <a:lnTo>
+                  <a:pt x="1035080" y="251377"/>
+                </a:lnTo>
+                <a:lnTo>
+                  <a:pt x="968150" y="164990"/>
+                </a:lnTo>
+                <a:lnTo>
+                  <a:pt x="883321" y="93391"/>
+                </a:lnTo>
+                <a:lnTo>
+                  <a:pt x="783704" y="39691"/>
+                </a:lnTo>
+                <a:lnTo>
+                  <a:pt x="673970" y="8561"/>
+                </a:lnTo>
+                <a:lnTo>
+                  <a:pt x="558010" y="0"/>
+                </a:lnTo>
+                <a:lnTo>
+                  <a:pt x="441271" y="16343"/>
+                </a:lnTo>
+                <a:lnTo>
+                  <a:pt x="329202" y="57591"/>
+                </a:lnTo>
+                <a:lnTo>
+                  <a:pt x="226472" y="122186"/>
+                </a:lnTo>
+                <a:lnTo>
+                  <a:pt x="137751" y="207794"/>
+                </a:lnTo>
+                <a:lnTo>
+                  <a:pt x="68487" y="312081"/>
+                </a:lnTo>
+                <a:lnTo>
+                  <a:pt x="21791" y="429597"/>
+                </a:lnTo>
+                <a:lnTo>
+                  <a:pt x="0" y="555675"/>
+                </a:lnTo>
+                <a:lnTo>
+                  <a:pt x="5448" y="685644"/>
+                </a:lnTo>
+                <a:lnTo>
+                  <a:pt x="38135" y="813278"/>
+                </a:lnTo>
+                <a:lnTo>
+                  <a:pt x="98060" y="932351"/>
+                </a:lnTo>
+                <a:lnTo>
+                  <a:pt x="182112" y="1038194"/>
+                </a:lnTo>
+                <a:lnTo>
+                  <a:pt x="287955" y="1124580"/>
+                </a:lnTo>
+                <a:lnTo>
+                  <a:pt x="410919" y="1188397"/>
+                </a:lnTo>
+                <a:lnTo>
+                  <a:pt x="546336" y="1225753"/>
+                </a:lnTo>
+                <a:lnTo>
+                  <a:pt x="687978" y="1233536"/>
+                </a:lnTo>
+                <a:lnTo>
+                  <a:pt x="829621" y="1211745"/>
+                </a:lnTo>
+                <a:lnTo>
+                  <a:pt x="965816" y="1160380"/>
+                </a:lnTo>
+                <a:lnTo>
+                  <a:pt x="1088780" y="1080998"/>
+                </a:lnTo>
+                <a:lnTo>
+                  <a:pt x="1194623" y="975933"/>
+                </a:lnTo>
+                <a:lnTo>
+                  <a:pt x="1277118" y="849856"/>
+                </a:lnTo>
+                <a:lnTo>
+                  <a:pt x="1331596" y="707435"/>
+                </a:lnTo>
+                <a:lnTo>
+                  <a:pt x="1355722" y="555675"/>
                 </a:lnTo>
               </a:path>
             </a:pathLst>
@@ -4166,7 +4199,7 @@
       </p:sp>
       <p:sp>
         <p:nvSpPr>
-          <p:cNvPr id="12" name="S03-label26"/>
+          <p:cNvPr id="13" name="S03-label27"/>
           <p:cNvSpPr txBox="1"/>
           <p:nvPr/>
         </p:nvSpPr>
@@ -4319,7 +4352,7 @@
       </p:sp>
       <p:sp>
         <p:nvSpPr>
-          <p:cNvPr id="3" name="S04-text27"/>
+          <p:cNvPr id="3" name="S04-text28"/>
           <p:cNvSpPr txBox="1"/>
           <p:nvPr/>
         </p:nvSpPr>
@@ -4358,7 +4391,7 @@
       </p:sp>
       <p:sp>
         <p:nvSpPr>
-          <p:cNvPr id="4" name="S04-card28"/>
+          <p:cNvPr id="4" name="S04-card29"/>
           <p:cNvSpPr/>
           <p:nvPr/>
         </p:nvSpPr>
@@ -4385,7 +4418,7 @@
       </p:sp>
       <p:sp>
         <p:nvSpPr>
-          <p:cNvPr id="5" name="S04-cardtext29"/>
+          <p:cNvPr id="5" name="S04-cardtext30"/>
           <p:cNvSpPr txBox="1"/>
           <p:nvPr/>
         </p:nvSpPr>
@@ -4427,7 +4460,7 @@
       </p:sp>
       <p:sp>
         <p:nvSpPr>
-          <p:cNvPr id="6" name="S04-card30"/>
+          <p:cNvPr id="6" name="S04-card31"/>
           <p:cNvSpPr/>
           <p:nvPr/>
         </p:nvSpPr>
@@ -4454,7 +4487,7 @@
       </p:sp>
       <p:sp>
         <p:nvSpPr>
-          <p:cNvPr id="7" name="S04-cardtext31"/>
+          <p:cNvPr id="7" name="S04-cardtext32"/>
           <p:cNvSpPr txBox="1"/>
           <p:nvPr/>
         </p:nvSpPr>
@@ -4576,7 +4609,7 @@
       </p:sp>
       <p:sp>
         <p:nvSpPr>
-          <p:cNvPr id="8" name="S04-stepno32"/>
+          <p:cNvPr id="8" name="S04-stepno33"/>
           <p:cNvSpPr txBox="1"/>
           <p:nvPr/>
         </p:nvSpPr>
@@ -4621,7 +4654,7 @@
       </p:sp>
       <p:sp>
         <p:nvSpPr>
-          <p:cNvPr id="9" name="S04-text33"/>
+          <p:cNvPr id="9" name="S04-text34"/>
           <p:cNvSpPr txBox="1"/>
           <p:nvPr/>
         </p:nvSpPr>
@@ -4660,7 +4693,7 @@
       </p:sp>
       <p:sp>
         <p:nvSpPr>
-          <p:cNvPr id="10" name="S04-stepno34"/>
+          <p:cNvPr id="10" name="S04-stepno35"/>
           <p:cNvSpPr txBox="1"/>
           <p:nvPr/>
         </p:nvSpPr>
@@ -4705,7 +4738,7 @@
       </p:sp>
       <p:sp>
         <p:nvSpPr>
-          <p:cNvPr id="11" name="S04-text35"/>
+          <p:cNvPr id="11" name="S04-text36"/>
           <p:cNvSpPr txBox="1"/>
           <p:nvPr/>
         </p:nvSpPr>
@@ -4744,7 +4777,7 @@
       </p:sp>
       <p:sp>
         <p:nvSpPr>
-          <p:cNvPr id="12" name="S04-stepno36"/>
+          <p:cNvPr id="12" name="S04-stepno37"/>
           <p:cNvSpPr txBox="1"/>
           <p:nvPr/>
         </p:nvSpPr>
@@ -4789,7 +4822,7 @@
       </p:sp>
       <p:sp>
         <p:nvSpPr>
-          <p:cNvPr id="13" name="S04-text37"/>
+          <p:cNvPr id="13" name="S04-text38"/>
           <p:cNvSpPr txBox="1"/>
           <p:nvPr/>
         </p:nvSpPr>
@@ -4828,7 +4861,7 @@
       </p:sp>
       <p:sp>
         <p:nvSpPr>
-          <p:cNvPr id="14" name="S04-stepno38"/>
+          <p:cNvPr id="14" name="S04-stepno39"/>
           <p:cNvSpPr txBox="1"/>
           <p:nvPr/>
         </p:nvSpPr>
@@ -4873,7 +4906,7 @@
       </p:sp>
       <p:sp>
         <p:nvSpPr>
-          <p:cNvPr id="15" name="S04-text39"/>
+          <p:cNvPr id="15" name="S04-text40"/>
           <p:cNvSpPr txBox="1"/>
           <p:nvPr/>
         </p:nvSpPr>
@@ -5026,76 +5059,7 @@
       </p:sp>
       <p:sp>
         <p:nvSpPr>
-          <p:cNvPr id="3" name="S05-card40"/>
-          <p:cNvSpPr/>
-          <p:nvPr/>
-        </p:nvSpPr>
-        <p:spPr>
-          <a:xfrm>
-            <a:off x="548640" y="1325880"/>
-            <a:ext cx="11091672" cy="868680"/>
-          </a:xfrm>
-          <a:prstGeom prst="roundRect">
-            <a:avLst>
-              <a:gd name="adj" fmla="val 12632"/>
-            </a:avLst>
-          </a:prstGeom>
-          <a:solidFill>
-            <a:srgbClr val="EAF3F1"/>
-          </a:solidFill>
-          <a:ln w="12700">
-            <a:solidFill>
-              <a:srgbClr val="EAF3F1"/>
-            </a:solidFill>
-            <a:prstDash val="solid"/>
-          </a:ln>
-        </p:spPr>
-      </p:sp>
-      <p:sp>
-        <p:nvSpPr>
-          <p:cNvPr id="4" name="S05-cardtext41"/>
-          <p:cNvSpPr txBox="1"/>
-          <p:nvPr/>
-        </p:nvSpPr>
-        <p:spPr>
-          <a:xfrm>
-            <a:off x="822960" y="1463040"/>
-            <a:ext cx="10543032" cy="594360"/>
-          </a:xfrm>
-          <a:prstGeom prst="rect">
-            <a:avLst/>
-          </a:prstGeom>
-          <a:noFill/>
-          <a:ln/>
-        </p:spPr>
-        <p:txBody>
-          <a:bodyPr wrap="square" lIns="0" tIns="0" rIns="0" bIns="0" rtlCol="0" anchor="ctr"/>
-          <a:lstStyle/>
-          <a:p>
-            <a:pPr eaLnBrk="0" indent="0" marL="0">
-              <a:spcAft>
-                <a:spcPts val="600"/>
-              </a:spcAft>
-              <a:buNone/>
-            </a:pPr>
-            <a:r>
-              <a:rPr lang="ko-KR" altLang="en-US" sz="3200" dirty="0">
-                <a:solidFill>
-                  <a:srgbClr val="1F2937"/>
-                </a:solidFill>
-                <a:latin typeface="맑은 고딕" pitchFamily="34" charset="0"/>
-                <a:ea typeface="맑은 고딕" pitchFamily="34" charset="-122"/>
-                <a:cs typeface="맑은 고딕" pitchFamily="34" charset="-120"/>
-              </a:rPr>
-              <a:t>선과 색으로만 그린 그림이에요.</a:t>
-            </a:r>
-            <a:endParaRPr lang="ko-KR" sz="3200" dirty="0"/>
-          </a:p>
-        </p:txBody>
-      </p:sp>
-      <p:sp>
-        <p:nvSpPr>
-          <p:cNvPr id="5" name="S05-card42"/>
+          <p:cNvPr id="3" name="S05-card41"/>
           <p:cNvSpPr/>
           <p:nvPr/>
         </p:nvSpPr>
@@ -5122,7 +5086,7 @@
       </p:sp>
       <p:sp>
         <p:nvSpPr>
-          <p:cNvPr id="6" name="S05-cardtext43"/>
+          <p:cNvPr id="4" name="S05-cardtext42"/>
           <p:cNvSpPr txBox="1"/>
           <p:nvPr/>
         </p:nvSpPr>
@@ -5164,13 +5128,13 @@
       </p:sp>
       <p:sp>
         <p:nvSpPr>
-          <p:cNvPr id="7" name="S05-chip44"/>
+          <p:cNvPr id="5" name="S05-chip43"/>
           <p:cNvSpPr txBox="1"/>
           <p:nvPr/>
         </p:nvSpPr>
         <p:spPr>
           <a:xfrm>
-            <a:off x="548640" y="2423160"/>
+            <a:off x="548640" y="1325880"/>
             <a:ext cx="5362956" cy="566928"/>
           </a:xfrm>
           <a:prstGeom prst="roundRect">
@@ -5211,14 +5175,14 @@
       </p:sp>
       <p:sp>
         <p:nvSpPr>
-          <p:cNvPr id="8" name="S05-figure45" descr="가: 파란 구불구불한 선 두 줄과 위쪽의 짧은 비스듬한 선들"/>
+          <p:cNvPr id="6" name="S05-figure44" descr="가: 파란 구불구불한 선 두 줄과 위쪽의 짧은 비스듬한 선들"/>
           <p:cNvSpPr/>
           <p:nvPr/>
         </p:nvSpPr>
         <p:spPr>
           <a:xfrm>
-            <a:off x="2559825" y="4024577"/>
-            <a:ext cx="1340585" cy="200082"/>
+            <a:off x="647700" y="3406438"/>
+            <a:ext cx="5164836" cy="387363"/>
           </a:xfrm>
           <a:custGeom>
             <a:avLst/>
@@ -5227,153 +5191,153 @@
             <a:cxnLst/>
             <a:rect l="l" t="t" r="r" b="b"/>
             <a:pathLst>
-              <a:path w="1340585" h="200082">
+              <a:path w="5164836" h="387363">
                 <a:moveTo>
-                  <a:pt x="0" y="100544"/>
+                  <a:pt x="0" y="193681"/>
                 </a:moveTo>
                 <a:lnTo>
-                  <a:pt x="27817" y="68370"/>
-                </a:lnTo>
-                <a:lnTo>
-                  <a:pt x="55969" y="39212"/>
-                </a:lnTo>
-                <a:lnTo>
-                  <a:pt x="83787" y="17092"/>
-                </a:lnTo>
-                <a:lnTo>
-                  <a:pt x="111604" y="3351"/>
-                </a:lnTo>
-                <a:lnTo>
-                  <a:pt x="139756" y="335"/>
-                </a:lnTo>
-                <a:lnTo>
-                  <a:pt x="167573" y="7708"/>
-                </a:lnTo>
-                <a:lnTo>
-                  <a:pt x="195390" y="24801"/>
-                </a:lnTo>
-                <a:lnTo>
-                  <a:pt x="223543" y="50272"/>
-                </a:lnTo>
-                <a:lnTo>
-                  <a:pt x="251360" y="80770"/>
-                </a:lnTo>
-                <a:lnTo>
-                  <a:pt x="279177" y="113615"/>
-                </a:lnTo>
-                <a:lnTo>
-                  <a:pt x="307329" y="145118"/>
-                </a:lnTo>
-                <a:lnTo>
-                  <a:pt x="335146" y="171595"/>
-                </a:lnTo>
-                <a:lnTo>
-                  <a:pt x="362963" y="190698"/>
-                </a:lnTo>
-                <a:lnTo>
-                  <a:pt x="391116" y="200082"/>
-                </a:lnTo>
-                <a:lnTo>
-                  <a:pt x="418933" y="199077"/>
-                </a:lnTo>
-                <a:lnTo>
-                  <a:pt x="446750" y="187682"/>
-                </a:lnTo>
-                <a:lnTo>
-                  <a:pt x="474902" y="166903"/>
-                </a:lnTo>
-                <a:lnTo>
-                  <a:pt x="502719" y="139086"/>
-                </a:lnTo>
-                <a:lnTo>
-                  <a:pt x="530537" y="107247"/>
-                </a:lnTo>
-                <a:lnTo>
-                  <a:pt x="558689" y="74402"/>
-                </a:lnTo>
-                <a:lnTo>
-                  <a:pt x="586506" y="44574"/>
-                </a:lnTo>
-                <a:lnTo>
-                  <a:pt x="614323" y="20779"/>
-                </a:lnTo>
-                <a:lnTo>
-                  <a:pt x="642475" y="5362"/>
-                </a:lnTo>
-                <a:lnTo>
-                  <a:pt x="670293" y="0"/>
-                </a:lnTo>
-                <a:lnTo>
-                  <a:pt x="698110" y="5362"/>
-                </a:lnTo>
-                <a:lnTo>
-                  <a:pt x="726262" y="20779"/>
-                </a:lnTo>
-                <a:lnTo>
-                  <a:pt x="754079" y="44574"/>
-                </a:lnTo>
-                <a:lnTo>
-                  <a:pt x="781896" y="74402"/>
-                </a:lnTo>
-                <a:lnTo>
-                  <a:pt x="810049" y="107247"/>
-                </a:lnTo>
-                <a:lnTo>
-                  <a:pt x="837866" y="139086"/>
-                </a:lnTo>
-                <a:lnTo>
-                  <a:pt x="865683" y="166903"/>
-                </a:lnTo>
-                <a:lnTo>
-                  <a:pt x="893835" y="187682"/>
-                </a:lnTo>
-                <a:lnTo>
-                  <a:pt x="921652" y="199077"/>
-                </a:lnTo>
-                <a:lnTo>
-                  <a:pt x="949470" y="200082"/>
-                </a:lnTo>
-                <a:lnTo>
-                  <a:pt x="977622" y="190698"/>
-                </a:lnTo>
-                <a:lnTo>
-                  <a:pt x="1005439" y="171595"/>
-                </a:lnTo>
-                <a:lnTo>
-                  <a:pt x="1033256" y="145118"/>
-                </a:lnTo>
-                <a:lnTo>
-                  <a:pt x="1061408" y="113615"/>
-                </a:lnTo>
-                <a:lnTo>
-                  <a:pt x="1089226" y="80770"/>
-                </a:lnTo>
-                <a:lnTo>
-                  <a:pt x="1117043" y="50272"/>
-                </a:lnTo>
-                <a:lnTo>
-                  <a:pt x="1145195" y="24801"/>
-                </a:lnTo>
-                <a:lnTo>
-                  <a:pt x="1173012" y="7708"/>
-                </a:lnTo>
-                <a:lnTo>
-                  <a:pt x="1200829" y="335"/>
-                </a:lnTo>
-                <a:lnTo>
-                  <a:pt x="1228982" y="3351"/>
-                </a:lnTo>
-                <a:lnTo>
-                  <a:pt x="1256799" y="17092"/>
-                </a:lnTo>
-                <a:lnTo>
-                  <a:pt x="1284616" y="39212"/>
-                </a:lnTo>
-                <a:lnTo>
-                  <a:pt x="1312768" y="68370"/>
-                </a:lnTo>
-                <a:lnTo>
-                  <a:pt x="1340585" y="100544"/>
+                  <a:pt x="107816" y="96841"/>
+                </a:lnTo>
+                <a:lnTo>
+                  <a:pt x="214986" y="25824"/>
+                </a:lnTo>
+                <a:lnTo>
+                  <a:pt x="322802" y="0"/>
+                </a:lnTo>
+                <a:lnTo>
+                  <a:pt x="430618" y="25824"/>
+                </a:lnTo>
+                <a:lnTo>
+                  <a:pt x="537789" y="96841"/>
+                </a:lnTo>
+                <a:lnTo>
+                  <a:pt x="645605" y="193681"/>
+                </a:lnTo>
+                <a:lnTo>
+                  <a:pt x="753420" y="290522"/>
+                </a:lnTo>
+                <a:lnTo>
+                  <a:pt x="860591" y="361539"/>
+                </a:lnTo>
+                <a:lnTo>
+                  <a:pt x="968407" y="387363"/>
+                </a:lnTo>
+                <a:lnTo>
+                  <a:pt x="1076223" y="361539"/>
+                </a:lnTo>
+                <a:lnTo>
+                  <a:pt x="1183393" y="290522"/>
+                </a:lnTo>
+                <a:lnTo>
+                  <a:pt x="1291209" y="193681"/>
+                </a:lnTo>
+                <a:lnTo>
+                  <a:pt x="1399025" y="96841"/>
+                </a:lnTo>
+                <a:lnTo>
+                  <a:pt x="1506195" y="25824"/>
+                </a:lnTo>
+                <a:lnTo>
+                  <a:pt x="1614011" y="0"/>
+                </a:lnTo>
+                <a:lnTo>
+                  <a:pt x="1721827" y="25824"/>
+                </a:lnTo>
+                <a:lnTo>
+                  <a:pt x="1828998" y="96841"/>
+                </a:lnTo>
+                <a:lnTo>
+                  <a:pt x="1936814" y="193681"/>
+                </a:lnTo>
+                <a:lnTo>
+                  <a:pt x="2044629" y="290522"/>
+                </a:lnTo>
+                <a:lnTo>
+                  <a:pt x="2151800" y="361539"/>
+                </a:lnTo>
+                <a:lnTo>
+                  <a:pt x="2259616" y="387363"/>
+                </a:lnTo>
+                <a:lnTo>
+                  <a:pt x="2367432" y="361539"/>
+                </a:lnTo>
+                <a:lnTo>
+                  <a:pt x="2474602" y="290522"/>
+                </a:lnTo>
+                <a:lnTo>
+                  <a:pt x="2582418" y="193681"/>
+                </a:lnTo>
+                <a:lnTo>
+                  <a:pt x="2690234" y="96841"/>
+                </a:lnTo>
+                <a:lnTo>
+                  <a:pt x="2797404" y="25824"/>
+                </a:lnTo>
+                <a:lnTo>
+                  <a:pt x="2905220" y="0"/>
+                </a:lnTo>
+                <a:lnTo>
+                  <a:pt x="3013036" y="25824"/>
+                </a:lnTo>
+                <a:lnTo>
+                  <a:pt x="3120207" y="96841"/>
+                </a:lnTo>
+                <a:lnTo>
+                  <a:pt x="3228022" y="193681"/>
+                </a:lnTo>
+                <a:lnTo>
+                  <a:pt x="3335838" y="290522"/>
+                </a:lnTo>
+                <a:lnTo>
+                  <a:pt x="3443009" y="361539"/>
+                </a:lnTo>
+                <a:lnTo>
+                  <a:pt x="3550825" y="387363"/>
+                </a:lnTo>
+                <a:lnTo>
+                  <a:pt x="3658641" y="361539"/>
+                </a:lnTo>
+                <a:lnTo>
+                  <a:pt x="3765811" y="290522"/>
+                </a:lnTo>
+                <a:lnTo>
+                  <a:pt x="3873627" y="193681"/>
+                </a:lnTo>
+                <a:lnTo>
+                  <a:pt x="3981443" y="96841"/>
+                </a:lnTo>
+                <a:lnTo>
+                  <a:pt x="4088613" y="25824"/>
+                </a:lnTo>
+                <a:lnTo>
+                  <a:pt x="4196429" y="0"/>
+                </a:lnTo>
+                <a:lnTo>
+                  <a:pt x="4304245" y="25824"/>
+                </a:lnTo>
+                <a:lnTo>
+                  <a:pt x="4411416" y="96841"/>
+                </a:lnTo>
+                <a:lnTo>
+                  <a:pt x="4519232" y="193681"/>
+                </a:lnTo>
+                <a:lnTo>
+                  <a:pt x="4627047" y="290522"/>
+                </a:lnTo>
+                <a:lnTo>
+                  <a:pt x="4734218" y="361539"/>
+                </a:lnTo>
+                <a:lnTo>
+                  <a:pt x="4842034" y="387363"/>
+                </a:lnTo>
+                <a:lnTo>
+                  <a:pt x="4949850" y="361539"/>
+                </a:lnTo>
+                <a:lnTo>
+                  <a:pt x="5057020" y="290522"/>
+                </a:lnTo>
+                <a:lnTo>
+                  <a:pt x="5164836" y="193681"/>
                 </a:lnTo>
               </a:path>
             </a:pathLst>
@@ -5389,14 +5353,14 @@
       </p:sp>
       <p:sp>
         <p:nvSpPr>
-          <p:cNvPr id="9" name="S05-mark46"/>
+          <p:cNvPr id="7" name="S05-mark45"/>
           <p:cNvSpPr/>
           <p:nvPr/>
         </p:nvSpPr>
         <p:spPr>
           <a:xfrm>
-            <a:off x="2559825" y="4292694"/>
-            <a:ext cx="1340585" cy="200082"/>
+            <a:off x="647700" y="3890642"/>
+            <a:ext cx="5164836" cy="387363"/>
           </a:xfrm>
           <a:custGeom>
             <a:avLst/>
@@ -5405,153 +5369,153 @@
             <a:cxnLst/>
             <a:rect l="l" t="t" r="r" b="b"/>
             <a:pathLst>
-              <a:path w="1340585" h="200082">
+              <a:path w="5164836" h="387363">
                 <a:moveTo>
-                  <a:pt x="0" y="100544"/>
+                  <a:pt x="0" y="193681"/>
                 </a:moveTo>
                 <a:lnTo>
-                  <a:pt x="27817" y="68370"/>
-                </a:lnTo>
-                <a:lnTo>
-                  <a:pt x="55969" y="39212"/>
-                </a:lnTo>
-                <a:lnTo>
-                  <a:pt x="83787" y="17092"/>
-                </a:lnTo>
-                <a:lnTo>
-                  <a:pt x="111604" y="3351"/>
-                </a:lnTo>
-                <a:lnTo>
-                  <a:pt x="139756" y="335"/>
-                </a:lnTo>
-                <a:lnTo>
-                  <a:pt x="167573" y="7708"/>
-                </a:lnTo>
-                <a:lnTo>
-                  <a:pt x="195390" y="24801"/>
-                </a:lnTo>
-                <a:lnTo>
-                  <a:pt x="223543" y="50272"/>
-                </a:lnTo>
-                <a:lnTo>
-                  <a:pt x="251360" y="80770"/>
-                </a:lnTo>
-                <a:lnTo>
-                  <a:pt x="279177" y="113615"/>
-                </a:lnTo>
-                <a:lnTo>
-                  <a:pt x="307329" y="145118"/>
-                </a:lnTo>
-                <a:lnTo>
-                  <a:pt x="335146" y="171595"/>
-                </a:lnTo>
-                <a:lnTo>
-                  <a:pt x="362963" y="190698"/>
-                </a:lnTo>
-                <a:lnTo>
-                  <a:pt x="391116" y="200082"/>
-                </a:lnTo>
-                <a:lnTo>
-                  <a:pt x="418933" y="199077"/>
-                </a:lnTo>
-                <a:lnTo>
-                  <a:pt x="446750" y="187682"/>
-                </a:lnTo>
-                <a:lnTo>
-                  <a:pt x="474902" y="166903"/>
-                </a:lnTo>
-                <a:lnTo>
-                  <a:pt x="502719" y="139086"/>
-                </a:lnTo>
-                <a:lnTo>
-                  <a:pt x="530537" y="107247"/>
-                </a:lnTo>
-                <a:lnTo>
-                  <a:pt x="558689" y="74402"/>
-                </a:lnTo>
-                <a:lnTo>
-                  <a:pt x="586506" y="44574"/>
-                </a:lnTo>
-                <a:lnTo>
-                  <a:pt x="614323" y="20779"/>
-                </a:lnTo>
-                <a:lnTo>
-                  <a:pt x="642475" y="5362"/>
-                </a:lnTo>
-                <a:lnTo>
-                  <a:pt x="670293" y="0"/>
-                </a:lnTo>
-                <a:lnTo>
-                  <a:pt x="698110" y="5362"/>
-                </a:lnTo>
-                <a:lnTo>
-                  <a:pt x="726262" y="20779"/>
-                </a:lnTo>
-                <a:lnTo>
-                  <a:pt x="754079" y="44574"/>
-                </a:lnTo>
-                <a:lnTo>
-                  <a:pt x="781896" y="74402"/>
-                </a:lnTo>
-                <a:lnTo>
-                  <a:pt x="810049" y="107247"/>
-                </a:lnTo>
-                <a:lnTo>
-                  <a:pt x="837866" y="139086"/>
-                </a:lnTo>
-                <a:lnTo>
-                  <a:pt x="865683" y="166903"/>
-                </a:lnTo>
-                <a:lnTo>
-                  <a:pt x="893835" y="187682"/>
-                </a:lnTo>
-                <a:lnTo>
-                  <a:pt x="921652" y="199077"/>
-                </a:lnTo>
-                <a:lnTo>
-                  <a:pt x="949470" y="200082"/>
-                </a:lnTo>
-                <a:lnTo>
-                  <a:pt x="977622" y="190698"/>
-                </a:lnTo>
-                <a:lnTo>
-                  <a:pt x="1005439" y="171595"/>
-                </a:lnTo>
-                <a:lnTo>
-                  <a:pt x="1033256" y="145118"/>
-                </a:lnTo>
-                <a:lnTo>
-                  <a:pt x="1061408" y="113615"/>
-                </a:lnTo>
-                <a:lnTo>
-                  <a:pt x="1089226" y="80770"/>
-                </a:lnTo>
-                <a:lnTo>
-                  <a:pt x="1117043" y="50272"/>
-                </a:lnTo>
-                <a:lnTo>
-                  <a:pt x="1145195" y="24801"/>
-                </a:lnTo>
-                <a:lnTo>
-                  <a:pt x="1173012" y="7708"/>
-                </a:lnTo>
-                <a:lnTo>
-                  <a:pt x="1200829" y="335"/>
-                </a:lnTo>
-                <a:lnTo>
-                  <a:pt x="1228982" y="3351"/>
-                </a:lnTo>
-                <a:lnTo>
-                  <a:pt x="1256799" y="17092"/>
-                </a:lnTo>
-                <a:lnTo>
-                  <a:pt x="1284616" y="39212"/>
-                </a:lnTo>
-                <a:lnTo>
-                  <a:pt x="1312768" y="68370"/>
-                </a:lnTo>
-                <a:lnTo>
-                  <a:pt x="1340585" y="100544"/>
+                  <a:pt x="107816" y="96841"/>
+                </a:lnTo>
+                <a:lnTo>
+                  <a:pt x="214986" y="25824"/>
+                </a:lnTo>
+                <a:lnTo>
+                  <a:pt x="322802" y="0"/>
+                </a:lnTo>
+                <a:lnTo>
+                  <a:pt x="430618" y="25824"/>
+                </a:lnTo>
+                <a:lnTo>
+                  <a:pt x="537789" y="96841"/>
+                </a:lnTo>
+                <a:lnTo>
+                  <a:pt x="645605" y="193681"/>
+                </a:lnTo>
+                <a:lnTo>
+                  <a:pt x="753420" y="290522"/>
+                </a:lnTo>
+                <a:lnTo>
+                  <a:pt x="860591" y="361539"/>
+                </a:lnTo>
+                <a:lnTo>
+                  <a:pt x="968407" y="387363"/>
+                </a:lnTo>
+                <a:lnTo>
+                  <a:pt x="1076223" y="361539"/>
+                </a:lnTo>
+                <a:lnTo>
+                  <a:pt x="1183393" y="290522"/>
+                </a:lnTo>
+                <a:lnTo>
+                  <a:pt x="1291209" y="193681"/>
+                </a:lnTo>
+                <a:lnTo>
+                  <a:pt x="1399025" y="96841"/>
+                </a:lnTo>
+                <a:lnTo>
+                  <a:pt x="1506195" y="25824"/>
+                </a:lnTo>
+                <a:lnTo>
+                  <a:pt x="1614011" y="0"/>
+                </a:lnTo>
+                <a:lnTo>
+                  <a:pt x="1721827" y="25824"/>
+                </a:lnTo>
+                <a:lnTo>
+                  <a:pt x="1828998" y="96841"/>
+                </a:lnTo>
+                <a:lnTo>
+                  <a:pt x="1936814" y="193681"/>
+                </a:lnTo>
+                <a:lnTo>
+                  <a:pt x="2044629" y="290522"/>
+                </a:lnTo>
+                <a:lnTo>
+                  <a:pt x="2151800" y="361539"/>
+                </a:lnTo>
+                <a:lnTo>
+                  <a:pt x="2259616" y="387363"/>
+                </a:lnTo>
+                <a:lnTo>
+                  <a:pt x="2367432" y="361539"/>
+                </a:lnTo>
+                <a:lnTo>
+                  <a:pt x="2474602" y="290522"/>
+                </a:lnTo>
+                <a:lnTo>
+                  <a:pt x="2582418" y="193681"/>
+                </a:lnTo>
+                <a:lnTo>
+                  <a:pt x="2690234" y="96841"/>
+                </a:lnTo>
+                <a:lnTo>
+                  <a:pt x="2797404" y="25824"/>
+                </a:lnTo>
+                <a:lnTo>
+                  <a:pt x="2905220" y="0"/>
+                </a:lnTo>
+                <a:lnTo>
+                  <a:pt x="3013036" y="25824"/>
+                </a:lnTo>
+                <a:lnTo>
+                  <a:pt x="3120207" y="96841"/>
+                </a:lnTo>
+                <a:lnTo>
+                  <a:pt x="3228022" y="193681"/>
+                </a:lnTo>
+                <a:lnTo>
+                  <a:pt x="3335838" y="290522"/>
+                </a:lnTo>
+                <a:lnTo>
+                  <a:pt x="3443009" y="361539"/>
+                </a:lnTo>
+                <a:lnTo>
+                  <a:pt x="3550825" y="387363"/>
+                </a:lnTo>
+                <a:lnTo>
+                  <a:pt x="3658641" y="361539"/>
+                </a:lnTo>
+                <a:lnTo>
+                  <a:pt x="3765811" y="290522"/>
+                </a:lnTo>
+                <a:lnTo>
+                  <a:pt x="3873627" y="193681"/>
+                </a:lnTo>
+                <a:lnTo>
+                  <a:pt x="3981443" y="96841"/>
+                </a:lnTo>
+                <a:lnTo>
+                  <a:pt x="4088613" y="25824"/>
+                </a:lnTo>
+                <a:lnTo>
+                  <a:pt x="4196429" y="0"/>
+                </a:lnTo>
+                <a:lnTo>
+                  <a:pt x="4304245" y="25824"/>
+                </a:lnTo>
+                <a:lnTo>
+                  <a:pt x="4411416" y="96841"/>
+                </a:lnTo>
+                <a:lnTo>
+                  <a:pt x="4519232" y="193681"/>
+                </a:lnTo>
+                <a:lnTo>
+                  <a:pt x="4627047" y="290522"/>
+                </a:lnTo>
+                <a:lnTo>
+                  <a:pt x="4734218" y="361539"/>
+                </a:lnTo>
+                <a:lnTo>
+                  <a:pt x="4842034" y="387363"/>
+                </a:lnTo>
+                <a:lnTo>
+                  <a:pt x="4949850" y="361539"/>
+                </a:lnTo>
+                <a:lnTo>
+                  <a:pt x="5057020" y="290522"/>
+                </a:lnTo>
+                <a:lnTo>
+                  <a:pt x="5164836" y="193681"/>
                 </a:lnTo>
               </a:path>
             </a:pathLst>
@@ -5567,14 +5531,14 @@
       </p:sp>
       <p:sp>
         <p:nvSpPr>
-          <p:cNvPr id="10" name="S05-mark47"/>
+          <p:cNvPr id="8" name="S05-mark46"/>
           <p:cNvSpPr/>
           <p:nvPr/>
         </p:nvSpPr>
         <p:spPr>
           <a:xfrm flipH="1">
-            <a:off x="2643612" y="3354284"/>
-            <a:ext cx="83787" cy="234602"/>
+            <a:off x="809101" y="2438032"/>
+            <a:ext cx="161401" cy="484203"/>
           </a:xfrm>
           <a:prstGeom prst="line">
             <a:avLst/>
@@ -5590,14 +5554,14 @@
       </p:sp>
       <p:sp>
         <p:nvSpPr>
-          <p:cNvPr id="11" name="S05-mark48"/>
+          <p:cNvPr id="9" name="S05-mark47"/>
           <p:cNvSpPr/>
           <p:nvPr/>
         </p:nvSpPr>
         <p:spPr>
           <a:xfrm flipH="1">
-            <a:off x="2878214" y="3354284"/>
-            <a:ext cx="83787" cy="234602"/>
+            <a:off x="1390145" y="2438032"/>
+            <a:ext cx="161401" cy="484203"/>
           </a:xfrm>
           <a:prstGeom prst="line">
             <a:avLst/>
@@ -5613,14 +5577,14 @@
       </p:sp>
       <p:sp>
         <p:nvSpPr>
-          <p:cNvPr id="12" name="S05-mark49"/>
+          <p:cNvPr id="10" name="S05-mark48"/>
           <p:cNvSpPr/>
           <p:nvPr/>
         </p:nvSpPr>
         <p:spPr>
           <a:xfrm flipH="1">
-            <a:off x="3112817" y="3354284"/>
-            <a:ext cx="83787" cy="234602"/>
+            <a:off x="1971189" y="2438032"/>
+            <a:ext cx="161401" cy="484203"/>
           </a:xfrm>
           <a:prstGeom prst="line">
             <a:avLst/>
@@ -5636,14 +5600,14 @@
       </p:sp>
       <p:sp>
         <p:nvSpPr>
-          <p:cNvPr id="13" name="S05-mark50"/>
+          <p:cNvPr id="11" name="S05-mark49"/>
           <p:cNvSpPr/>
           <p:nvPr/>
         </p:nvSpPr>
         <p:spPr>
           <a:xfrm flipH="1">
-            <a:off x="3347419" y="3354284"/>
-            <a:ext cx="83787" cy="234602"/>
+            <a:off x="2552233" y="2438032"/>
+            <a:ext cx="161401" cy="484203"/>
           </a:xfrm>
           <a:prstGeom prst="line">
             <a:avLst/>
@@ -5659,14 +5623,14 @@
       </p:sp>
       <p:sp>
         <p:nvSpPr>
-          <p:cNvPr id="14" name="S05-mark51"/>
+          <p:cNvPr id="12" name="S05-mark50"/>
           <p:cNvSpPr/>
           <p:nvPr/>
         </p:nvSpPr>
         <p:spPr>
           <a:xfrm flipH="1">
-            <a:off x="3582022" y="3354284"/>
-            <a:ext cx="83787" cy="234602"/>
+            <a:off x="3133277" y="2438032"/>
+            <a:ext cx="161401" cy="484203"/>
           </a:xfrm>
           <a:prstGeom prst="line">
             <a:avLst/>
@@ -5682,14 +5646,14 @@
       </p:sp>
       <p:sp>
         <p:nvSpPr>
-          <p:cNvPr id="15" name="S05-mark52"/>
+          <p:cNvPr id="13" name="S05-mark51"/>
           <p:cNvSpPr/>
           <p:nvPr/>
         </p:nvSpPr>
         <p:spPr>
           <a:xfrm flipH="1">
-            <a:off x="3816624" y="3354284"/>
-            <a:ext cx="83787" cy="234602"/>
+            <a:off x="3714321" y="2438032"/>
+            <a:ext cx="161401" cy="484203"/>
           </a:xfrm>
           <a:prstGeom prst="line">
             <a:avLst/>
@@ -5705,7 +5669,76 @@
       </p:sp>
       <p:sp>
         <p:nvSpPr>
-          <p:cNvPr id="16" name="S05-text53"/>
+          <p:cNvPr id="14" name="S05-mark52"/>
+          <p:cNvSpPr/>
+          <p:nvPr/>
+        </p:nvSpPr>
+        <p:spPr>
+          <a:xfrm flipH="1">
+            <a:off x="4295365" y="2438032"/>
+            <a:ext cx="161401" cy="484203"/>
+          </a:xfrm>
+          <a:prstGeom prst="line">
+            <a:avLst/>
+          </a:prstGeom>
+          <a:noFill/>
+          <a:ln w="50800">
+            <a:solidFill>
+              <a:srgbClr val="3D5A80"/>
+            </a:solidFill>
+            <a:prstDash val="solid"/>
+          </a:ln>
+        </p:spPr>
+      </p:sp>
+      <p:sp>
+        <p:nvSpPr>
+          <p:cNvPr id="15" name="S05-mark53"/>
+          <p:cNvSpPr/>
+          <p:nvPr/>
+        </p:nvSpPr>
+        <p:spPr>
+          <a:xfrm flipH="1">
+            <a:off x="4876409" y="2438032"/>
+            <a:ext cx="161401" cy="484203"/>
+          </a:xfrm>
+          <a:prstGeom prst="line">
+            <a:avLst/>
+          </a:prstGeom>
+          <a:noFill/>
+          <a:ln w="50800">
+            <a:solidFill>
+              <a:srgbClr val="3D5A80"/>
+            </a:solidFill>
+            <a:prstDash val="solid"/>
+          </a:ln>
+        </p:spPr>
+      </p:sp>
+      <p:sp>
+        <p:nvSpPr>
+          <p:cNvPr id="16" name="S05-mark54"/>
+          <p:cNvSpPr/>
+          <p:nvPr/>
+        </p:nvSpPr>
+        <p:spPr>
+          <a:xfrm flipH="1">
+            <a:off x="5457454" y="2438032"/>
+            <a:ext cx="161401" cy="484203"/>
+          </a:xfrm>
+          <a:prstGeom prst="line">
+            <a:avLst/>
+          </a:prstGeom>
+          <a:noFill/>
+          <a:ln w="50800">
+            <a:solidFill>
+              <a:srgbClr val="3D5A80"/>
+            </a:solidFill>
+            <a:prstDash val="solid"/>
+          </a:ln>
+        </p:spPr>
+      </p:sp>
+      <p:sp>
+        <p:nvSpPr>
+          <p:cNvPr id="17" name="S05-text55"/>
           <p:cNvSpPr txBox="1"/>
           <p:nvPr/>
         </p:nvSpPr>
@@ -5744,13 +5777,13 @@
       </p:sp>
       <p:sp>
         <p:nvSpPr>
-          <p:cNvPr id="17" name="S05-chip54"/>
+          <p:cNvPr id="18" name="S05-chip56"/>
           <p:cNvSpPr txBox="1"/>
           <p:nvPr/>
         </p:nvSpPr>
         <p:spPr>
           <a:xfrm>
-            <a:off x="6277356" y="2423160"/>
+            <a:off x="6277356" y="1325880"/>
             <a:ext cx="5362956" cy="566928"/>
           </a:xfrm>
           <a:prstGeom prst="roundRect">
@@ -5791,14 +5824,14 @@
       </p:sp>
       <p:sp>
         <p:nvSpPr>
-          <p:cNvPr id="18" name="S05-figure55" descr="나: 노란 동그라미와 그 아래 빨간·주황 지그재그 선 두 줄"/>
+          <p:cNvPr id="19" name="S05-figure57" descr="나: 노란 동그라미와 그 아래 빨간·주황 지그재그 선 두 줄"/>
           <p:cNvSpPr/>
           <p:nvPr/>
         </p:nvSpPr>
         <p:spPr>
           <a:xfrm>
-            <a:off x="8288541" y="3974305"/>
-            <a:ext cx="1340585" cy="234602"/>
+            <a:off x="6376416" y="3406438"/>
+            <a:ext cx="5164836" cy="387363"/>
           </a:xfrm>
           <a:custGeom>
             <a:avLst/>
@@ -5807,39 +5840,63 @@
             <a:cxnLst/>
             <a:rect l="l" t="t" r="r" b="b"/>
             <a:pathLst>
-              <a:path w="1340585" h="234602">
+              <a:path w="5164836" h="387363">
                 <a:moveTo>
-                  <a:pt x="0" y="234602"/>
+                  <a:pt x="0" y="387363"/>
                 </a:moveTo>
                 <a:lnTo>
-                  <a:pt x="134059" y="0"/>
-                </a:lnTo>
-                <a:lnTo>
-                  <a:pt x="268117" y="234602"/>
-                </a:lnTo>
-                <a:lnTo>
-                  <a:pt x="402176" y="0"/>
-                </a:lnTo>
-                <a:lnTo>
-                  <a:pt x="536234" y="234602"/>
-                </a:lnTo>
-                <a:lnTo>
-                  <a:pt x="670293" y="0"/>
-                </a:lnTo>
-                <a:lnTo>
-                  <a:pt x="804351" y="234602"/>
-                </a:lnTo>
-                <a:lnTo>
-                  <a:pt x="938410" y="0"/>
-                </a:lnTo>
-                <a:lnTo>
-                  <a:pt x="1072468" y="234602"/>
-                </a:lnTo>
-                <a:lnTo>
-                  <a:pt x="1206527" y="0"/>
-                </a:lnTo>
-                <a:lnTo>
-                  <a:pt x="1340585" y="234602"/>
+                  <a:pt x="286648" y="0"/>
+                </a:lnTo>
+                <a:lnTo>
+                  <a:pt x="573942" y="387363"/>
+                </a:lnTo>
+                <a:lnTo>
+                  <a:pt x="860591" y="0"/>
+                </a:lnTo>
+                <a:lnTo>
+                  <a:pt x="1147885" y="387363"/>
+                </a:lnTo>
+                <a:lnTo>
+                  <a:pt x="1434533" y="0"/>
+                </a:lnTo>
+                <a:lnTo>
+                  <a:pt x="1721827" y="387363"/>
+                </a:lnTo>
+                <a:lnTo>
+                  <a:pt x="2008476" y="0"/>
+                </a:lnTo>
+                <a:lnTo>
+                  <a:pt x="2295770" y="387363"/>
+                </a:lnTo>
+                <a:lnTo>
+                  <a:pt x="2582418" y="0"/>
+                </a:lnTo>
+                <a:lnTo>
+                  <a:pt x="2869066" y="387363"/>
+                </a:lnTo>
+                <a:lnTo>
+                  <a:pt x="3156360" y="0"/>
+                </a:lnTo>
+                <a:lnTo>
+                  <a:pt x="3443009" y="387363"/>
+                </a:lnTo>
+                <a:lnTo>
+                  <a:pt x="3730303" y="0"/>
+                </a:lnTo>
+                <a:lnTo>
+                  <a:pt x="4016951" y="387363"/>
+                </a:lnTo>
+                <a:lnTo>
+                  <a:pt x="4304245" y="0"/>
+                </a:lnTo>
+                <a:lnTo>
+                  <a:pt x="4590894" y="387363"/>
+                </a:lnTo>
+                <a:lnTo>
+                  <a:pt x="4878188" y="0"/>
+                </a:lnTo>
+                <a:lnTo>
+                  <a:pt x="5164836" y="387363"/>
                 </a:lnTo>
               </a:path>
             </a:pathLst>
@@ -5855,14 +5912,14 @@
       </p:sp>
       <p:sp>
         <p:nvSpPr>
-          <p:cNvPr id="19" name="S05-mark56"/>
+          <p:cNvPr id="20" name="S05-mark58"/>
           <p:cNvSpPr/>
           <p:nvPr/>
         </p:nvSpPr>
         <p:spPr>
           <a:xfrm>
-            <a:off x="8288541" y="4275936"/>
-            <a:ext cx="1340585" cy="234602"/>
+            <a:off x="6376416" y="3890642"/>
+            <a:ext cx="5164836" cy="387363"/>
           </a:xfrm>
           <a:custGeom>
             <a:avLst/>
@@ -5871,39 +5928,63 @@
             <a:cxnLst/>
             <a:rect l="l" t="t" r="r" b="b"/>
             <a:pathLst>
-              <a:path w="1340585" h="234602">
+              <a:path w="5164836" h="387363">
                 <a:moveTo>
-                  <a:pt x="0" y="234602"/>
+                  <a:pt x="0" y="387363"/>
                 </a:moveTo>
                 <a:lnTo>
-                  <a:pt x="134059" y="0"/>
-                </a:lnTo>
-                <a:lnTo>
-                  <a:pt x="268117" y="234602"/>
-                </a:lnTo>
-                <a:lnTo>
-                  <a:pt x="402176" y="0"/>
-                </a:lnTo>
-                <a:lnTo>
-                  <a:pt x="536234" y="234602"/>
-                </a:lnTo>
-                <a:lnTo>
-                  <a:pt x="670293" y="0"/>
-                </a:lnTo>
-                <a:lnTo>
-                  <a:pt x="804351" y="234602"/>
-                </a:lnTo>
-                <a:lnTo>
-                  <a:pt x="938410" y="0"/>
-                </a:lnTo>
-                <a:lnTo>
-                  <a:pt x="1072468" y="234602"/>
-                </a:lnTo>
-                <a:lnTo>
-                  <a:pt x="1206527" y="0"/>
-                </a:lnTo>
-                <a:lnTo>
-                  <a:pt x="1340585" y="234602"/>
+                  <a:pt x="286648" y="0"/>
+                </a:lnTo>
+                <a:lnTo>
+                  <a:pt x="573942" y="387363"/>
+                </a:lnTo>
+                <a:lnTo>
+                  <a:pt x="860591" y="0"/>
+                </a:lnTo>
+                <a:lnTo>
+                  <a:pt x="1147885" y="387363"/>
+                </a:lnTo>
+                <a:lnTo>
+                  <a:pt x="1434533" y="0"/>
+                </a:lnTo>
+                <a:lnTo>
+                  <a:pt x="1721827" y="387363"/>
+                </a:lnTo>
+                <a:lnTo>
+                  <a:pt x="2008476" y="0"/>
+                </a:lnTo>
+                <a:lnTo>
+                  <a:pt x="2295770" y="387363"/>
+                </a:lnTo>
+                <a:lnTo>
+                  <a:pt x="2582418" y="0"/>
+                </a:lnTo>
+                <a:lnTo>
+                  <a:pt x="2869066" y="387363"/>
+                </a:lnTo>
+                <a:lnTo>
+                  <a:pt x="3156360" y="0"/>
+                </a:lnTo>
+                <a:lnTo>
+                  <a:pt x="3443009" y="387363"/>
+                </a:lnTo>
+                <a:lnTo>
+                  <a:pt x="3730303" y="0"/>
+                </a:lnTo>
+                <a:lnTo>
+                  <a:pt x="4016951" y="387363"/>
+                </a:lnTo>
+                <a:lnTo>
+                  <a:pt x="4304245" y="0"/>
+                </a:lnTo>
+                <a:lnTo>
+                  <a:pt x="4590894" y="387363"/>
+                </a:lnTo>
+                <a:lnTo>
+                  <a:pt x="4878188" y="0"/>
+                </a:lnTo>
+                <a:lnTo>
+                  <a:pt x="5164836" y="387363"/>
                 </a:lnTo>
               </a:path>
             </a:pathLst>
@@ -5919,14 +6000,14 @@
       </p:sp>
       <p:sp>
         <p:nvSpPr>
-          <p:cNvPr id="20" name="S05-mark57"/>
+          <p:cNvPr id="21" name="S05-mark59"/>
           <p:cNvSpPr/>
           <p:nvPr/>
         </p:nvSpPr>
         <p:spPr>
           <a:xfrm>
-            <a:off x="8757746" y="3337527"/>
-            <a:ext cx="402176" cy="402176"/>
+            <a:off x="8571471" y="2405751"/>
+            <a:ext cx="774725" cy="774725"/>
           </a:xfrm>
           <a:prstGeom prst="ellipse">
             <a:avLst/>
@@ -5944,7 +6025,7 @@
       </p:sp>
       <p:sp>
         <p:nvSpPr>
-          <p:cNvPr id="21" name="S05-text58"/>
+          <p:cNvPr id="22" name="S05-text60"/>
           <p:cNvSpPr txBox="1"/>
           <p:nvPr/>
         </p:nvSpPr>
@@ -6097,7 +6178,7 @@
       </p:sp>
       <p:sp>
         <p:nvSpPr>
-          <p:cNvPr id="3" name="S06-text59"/>
+          <p:cNvPr id="3" name="S06-text61"/>
           <p:cNvSpPr txBox="1"/>
           <p:nvPr/>
         </p:nvSpPr>
@@ -6136,7 +6217,7 @@
       </p:sp>
       <p:sp>
         <p:nvSpPr>
-          <p:cNvPr id="4" name="S06-card60"/>
+          <p:cNvPr id="4" name="S06-card62"/>
           <p:cNvSpPr/>
           <p:nvPr/>
         </p:nvSpPr>
@@ -6163,7 +6244,7 @@
       </p:sp>
       <p:sp>
         <p:nvSpPr>
-          <p:cNvPr id="5" name="S06-cardtext61"/>
+          <p:cNvPr id="5" name="S06-cardtext63"/>
           <p:cNvSpPr txBox="1"/>
           <p:nvPr/>
         </p:nvSpPr>
@@ -6205,7 +6286,7 @@
       </p:sp>
       <p:sp>
         <p:nvSpPr>
-          <p:cNvPr id="6" name="S06-card62"/>
+          <p:cNvPr id="6" name="S06-card64"/>
           <p:cNvSpPr/>
           <p:nvPr/>
         </p:nvSpPr>
@@ -6232,7 +6313,7 @@
       </p:sp>
       <p:sp>
         <p:nvSpPr>
-          <p:cNvPr id="7" name="S06-cardtext63"/>
+          <p:cNvPr id="7" name="S06-cardtext65"/>
           <p:cNvSpPr txBox="1"/>
           <p:nvPr/>
         </p:nvSpPr>
@@ -6334,7 +6415,7 @@
       </p:sp>
       <p:sp>
         <p:nvSpPr>
-          <p:cNvPr id="8" name="S06-stepno64"/>
+          <p:cNvPr id="8" name="S06-stepno66"/>
           <p:cNvSpPr txBox="1"/>
           <p:nvPr/>
         </p:nvSpPr>
@@ -6379,7 +6460,7 @@
       </p:sp>
       <p:sp>
         <p:nvSpPr>
-          <p:cNvPr id="9" name="S06-text65"/>
+          <p:cNvPr id="9" name="S06-text67"/>
           <p:cNvSpPr txBox="1"/>
           <p:nvPr/>
         </p:nvSpPr>
@@ -6418,7 +6499,7 @@
       </p:sp>
       <p:sp>
         <p:nvSpPr>
-          <p:cNvPr id="10" name="S06-stepno66"/>
+          <p:cNvPr id="10" name="S06-stepno68"/>
           <p:cNvSpPr txBox="1"/>
           <p:nvPr/>
         </p:nvSpPr>
@@ -6463,7 +6544,7 @@
       </p:sp>
       <p:sp>
         <p:nvSpPr>
-          <p:cNvPr id="11" name="S06-text67"/>
+          <p:cNvPr id="11" name="S06-text69"/>
           <p:cNvSpPr txBox="1"/>
           <p:nvPr/>
         </p:nvSpPr>
@@ -6502,7 +6583,7 @@
       </p:sp>
       <p:sp>
         <p:nvSpPr>
-          <p:cNvPr id="12" name="S06-stepno68"/>
+          <p:cNvPr id="12" name="S06-stepno70"/>
           <p:cNvSpPr txBox="1"/>
           <p:nvPr/>
         </p:nvSpPr>
@@ -6547,7 +6628,7 @@
       </p:sp>
       <p:sp>
         <p:nvSpPr>
-          <p:cNvPr id="13" name="S06-text69"/>
+          <p:cNvPr id="13" name="S06-text71"/>
           <p:cNvSpPr txBox="1"/>
           <p:nvPr/>
         </p:nvSpPr>
@@ -6586,7 +6667,7 @@
       </p:sp>
       <p:sp>
         <p:nvSpPr>
-          <p:cNvPr id="14" name="S06-stepno70"/>
+          <p:cNvPr id="14" name="S06-stepno72"/>
           <p:cNvSpPr txBox="1"/>
           <p:nvPr/>
         </p:nvSpPr>
@@ -6631,7 +6712,7 @@
       </p:sp>
       <p:sp>
         <p:nvSpPr>
-          <p:cNvPr id="15" name="S06-text71"/>
+          <p:cNvPr id="15" name="S06-text73"/>
           <p:cNvSpPr txBox="1"/>
           <p:nvPr/>
         </p:nvSpPr>
@@ -6784,7 +6865,7 @@
       </p:sp>
       <p:sp>
         <p:nvSpPr>
-          <p:cNvPr id="3" name="S07-card72"/>
+          <p:cNvPr id="3" name="S07-card74"/>
           <p:cNvSpPr/>
           <p:nvPr/>
         </p:nvSpPr>
@@ -6811,7 +6892,7 @@
       </p:sp>
       <p:sp>
         <p:nvSpPr>
-          <p:cNvPr id="4" name="S07-cardtext73"/>
+          <p:cNvPr id="4" name="S07-cardtext75"/>
           <p:cNvSpPr txBox="1"/>
           <p:nvPr/>
         </p:nvSpPr>
@@ -6853,7 +6934,7 @@
       </p:sp>
       <p:sp>
         <p:nvSpPr>
-          <p:cNvPr id="5" name="S07-chip74"/>
+          <p:cNvPr id="5" name="S07-chip76"/>
           <p:cNvSpPr txBox="1"/>
           <p:nvPr/>
         </p:nvSpPr>
@@ -6900,7 +6981,7 @@
       </p:sp>
       <p:sp>
         <p:nvSpPr>
-          <p:cNvPr id="6" name="S07-chip75"/>
+          <p:cNvPr id="6" name="S07-chip77"/>
           <p:cNvSpPr txBox="1"/>
           <p:nvPr/>
         </p:nvSpPr>
@@ -6947,7 +7028,7 @@
       </p:sp>
       <p:sp>
         <p:nvSpPr>
-          <p:cNvPr id="7" name="S07-text76"/>
+          <p:cNvPr id="7" name="S07-text78"/>
           <p:cNvSpPr txBox="1"/>
           <p:nvPr/>
         </p:nvSpPr>
@@ -6986,7 +7067,7 @@
       </p:sp>
       <p:sp>
         <p:nvSpPr>
-          <p:cNvPr id="8" name="S07-text77"/>
+          <p:cNvPr id="8" name="S07-text79"/>
           <p:cNvSpPr txBox="1"/>
           <p:nvPr/>
         </p:nvSpPr>
@@ -7042,7 +7123,7 @@
       </p:sp>
       <p:sp>
         <p:nvSpPr>
-          <p:cNvPr id="9" name="S07-text78"/>
+          <p:cNvPr id="9" name="S07-text80"/>
           <p:cNvSpPr txBox="1"/>
           <p:nvPr/>
         </p:nvSpPr>
@@ -7098,7 +7179,7 @@
       </p:sp>
       <p:sp>
         <p:nvSpPr>
-          <p:cNvPr id="10" name="S07-text79"/>
+          <p:cNvPr id="10" name="S07-text81"/>
           <p:cNvSpPr txBox="1"/>
           <p:nvPr/>
         </p:nvSpPr>
@@ -7251,7 +7332,7 @@
       </p:sp>
       <p:sp>
         <p:nvSpPr>
-          <p:cNvPr id="3" name="S08-text80"/>
+          <p:cNvPr id="3" name="S08-text82"/>
           <p:cNvSpPr txBox="1"/>
           <p:nvPr/>
         </p:nvSpPr>
@@ -7290,7 +7371,7 @@
       </p:sp>
       <p:sp>
         <p:nvSpPr>
-          <p:cNvPr id="4" name="S08-card81"/>
+          <p:cNvPr id="4" name="S08-card83"/>
           <p:cNvSpPr/>
           <p:nvPr/>
         </p:nvSpPr>
@@ -7317,7 +7398,7 @@
       </p:sp>
       <p:sp>
         <p:nvSpPr>
-          <p:cNvPr id="5" name="S08-cardtext82"/>
+          <p:cNvPr id="5" name="S08-cardtext84"/>
           <p:cNvSpPr txBox="1"/>
           <p:nvPr/>
         </p:nvSpPr>
@@ -7359,7 +7440,7 @@
       </p:sp>
       <p:sp>
         <p:nvSpPr>
-          <p:cNvPr id="6" name="S08-figure83" descr="따라 그릴 점선: 곧은 선 하나와 구불구불한 선 하나"/>
+          <p:cNvPr id="6" name="S08-figure85" descr="따라 그릴 점선: 곧은 선 하나와 구불구불한 선 하나"/>
           <p:cNvSpPr/>
           <p:nvPr/>
         </p:nvSpPr>
@@ -7396,7 +7477,7 @@
       </p:sp>
       <p:sp>
         <p:nvSpPr>
-          <p:cNvPr id="7" name="S08-mark84"/>
+          <p:cNvPr id="7" name="S08-mark86"/>
           <p:cNvSpPr/>
           <p:nvPr/>
         </p:nvSpPr>

--- a/dist/초1/음악·미술/미술놀이/초1_음악·미술_미술놀이_01_색·선·모양탐색.pptx
+++ b/dist/초1/음악·미술/미술놀이/초1_음악·미술_미술놀이_01_색·선·모양탐색.pptx
@@ -114,34 +114,34 @@
   <p:extLst>
     <p:ext uri="{521415D9-36F7-43E2-AB2F-B90AF26B5E84}">
       <p14:sectionLst xmlns:p14="http://schemas.microsoft.com/office/powerpoint/2010/main">
-        <p14:section name="도입" id="{195610fa-80d2-f2be-2820-c52b3dcb5abb}">
+        <p14:section name="도입" id="{e4928780-cb51-d661-4a22-72d1c2ae5e8a}">
           <p14:sldIdLst>
             <p14:sldId id="256"/>
             <p14:sldId id="257"/>
           </p14:sldIdLst>
         </p14:section>
-        <p14:section name="개념" id="{42cfb5e9-9186-be77-4f87-5cf0fe4376af}">
+        <p14:section name="개념" id="{c5505b65-3745-a56c-a825-60ed8d8d398b}">
           <p14:sldIdLst>
             <p14:sldId id="258"/>
           </p14:sldIdLst>
         </p14:section>
-        <p14:section name="연습" id="{9e8f1ad4-7443-f9fd-0684-415e0d5d49a5}">
+        <p14:section name="연습" id="{ff70ad73-0241-ae72-7469-641c03cb5884}">
           <p14:sldIdLst>
             <p14:sldId id="259"/>
             <p14:sldId id="260"/>
           </p14:sldIdLst>
         </p14:section>
-        <p14:section name="확인" id="{dce730a6-77b0-5ccb-c431-440a428ea49f}">
+        <p14:section name="확인" id="{5076312c-1f67-1876-d4e2-52da9e868c7a}">
           <p14:sldIdLst>
             <p14:sldId id="261"/>
           </p14:sldIdLst>
         </p14:section>
-        <p14:section name="정리" id="{c59fa578-2bf4-9c03-57f0-b7a33f188ab3}">
+        <p14:section name="정리" id="{0785d01f-195d-e1dd-f7bd-dd7ff5f937f5}">
           <p14:sldIdLst>
             <p14:sldId id="262"/>
           </p14:sldIdLst>
         </p14:section>
-        <p14:section name="보충" id="{be0277a6-6256-237b-c922-60dfcc9413ac}">
+        <p14:section name="보충" id="{4a08a95e-53e6-e5bd-7a2f-b6d75122efc3}">
           <p14:sldIdLst>
             <p14:sldId id="263"/>
           </p14:sldIdLst>
